--- a/prenatal/THE_EDIT_GYNAECOLOGIST_INVITE.pptx
+++ b/prenatal/THE_EDIT_GYNAECOLOGIST_INVITE.pptx
@@ -2485,7 +2485,7 @@
         <p:spPr>
           <a:xfrm>
             <a:off x="640080" y="1417320"/>
-            <a:ext cx="10515600" cy="822960"/>
+            <a:ext cx="10515600" cy="1005840"/>
           </a:xfrm>
           <a:prstGeom prst="rect">
             <a:avLst/>
@@ -2512,7 +2512,7 @@
                 <a:ea typeface="Helvetica Neue" pitchFamily="34" charset="-122"/>
                 <a:cs typeface="Helvetica Neue" pitchFamily="34" charset="-120"/>
               </a:rPr>
-              <a:t>The Edit is a modern wellness brand for Indian couples and parents-to-be — across every stage of the family-building journey.</a:t>
+              <a:t>The Edit is the answer to a wellness market that hasn't kept up with how modern Indian couples actually live. A modern brand for Indian couples and parents-to-be — across every stage of the family-building journey.</a:t>
             </a:r>
             <a:endParaRPr lang="en-US" sz="1500" dirty="0"/>
           </a:p>
@@ -2526,7 +2526,7 @@
         </p:nvSpPr>
         <p:spPr>
           <a:xfrm>
-            <a:off x="640080" y="2468880"/>
+            <a:off x="640080" y="2651760"/>
             <a:ext cx="5029200" cy="274320"/>
           </a:xfrm>
           <a:prstGeom prst="rect">
@@ -2565,8 +2565,8 @@
         </p:nvSpPr>
         <p:spPr>
           <a:xfrm>
-            <a:off x="640080" y="2788920"/>
-            <a:ext cx="5029200" cy="3200400"/>
+            <a:off x="640080" y="2971800"/>
+            <a:ext cx="5029200" cy="3017520"/>
           </a:xfrm>
           <a:prstGeom prst="rect">
             <a:avLst/>
@@ -2747,7 +2747,7 @@
         </p:nvSpPr>
         <p:spPr>
           <a:xfrm>
-            <a:off x="5943600" y="2468880"/>
+            <a:off x="5943600" y="2651760"/>
             <a:ext cx="0" cy="3200400"/>
           </a:xfrm>
           <a:prstGeom prst="line">
@@ -2770,7 +2770,7 @@
         </p:nvSpPr>
         <p:spPr>
           <a:xfrm>
-            <a:off x="6309360" y="2468880"/>
+            <a:off x="6309360" y="2651760"/>
             <a:ext cx="5029200" cy="274320"/>
           </a:xfrm>
           <a:prstGeom prst="rect">
@@ -2809,8 +2809,8 @@
         </p:nvSpPr>
         <p:spPr>
           <a:xfrm>
-            <a:off x="6309360" y="2788920"/>
-            <a:ext cx="5029200" cy="3200400"/>
+            <a:off x="6309360" y="2971800"/>
+            <a:ext cx="5029200" cy="3017520"/>
           </a:xfrm>
           <a:prstGeom prst="rect">
             <a:avLst/>
